--- a/#presentations/004_kimgaejin_smartPointer.pptx
+++ b/#presentations/004_kimgaejin_smartPointer.pptx
@@ -12,7 +12,7 @@
     <p:sldId id="262" r:id="rId6"/>
     <p:sldId id="258" r:id="rId7"/>
     <p:sldId id="263" r:id="rId8"/>
-    <p:sldId id="259" r:id="rId9"/>
+    <p:sldId id="264" r:id="rId9"/>
   </p:sldIdLst>
   <p:sldSz cx="12192000" cy="6858000"/>
   <p:notesSz cx="6858000" cy="9144000"/>
@@ -3384,19 +3384,11 @@
           <a:p>
             <a:r>
               <a:rPr lang="en-US" altLang="ko-KR"/>
-              <a:t>~ shared_ptr</a:t>
-            </a:r>
-            <a:r>
-              <a:rPr lang="ko-KR" altLang="en-US"/>
-              <a:t>과 </a:t>
-            </a:r>
-            <a:r>
-              <a:rPr lang="en-US" altLang="ko-KR"/>
-              <a:t>unique_ptr </a:t>
-            </a:r>
-            <a:r>
-              <a:rPr lang="ko-KR" altLang="en-US"/>
-              <a:t>을 쓸 곳 </a:t>
+              <a:t>~ </a:t>
+            </a:r>
+            <a:r>
+              <a:rPr lang="ko-KR" altLang="en-US"/>
+              <a:t>어떤 종류의 스마트포인터를 써야하는지 </a:t>
             </a:r>
             <a:r>
               <a:rPr lang="en-US" altLang="ko-KR"/>
@@ -5056,9 +5048,18 @@
           <a:lstStyle/>
           <a:p>
             <a:r>
-              <a:rPr lang="ko-KR" altLang="en-US"/>
-              <a:t>그럼 쒸바 그냥 싹다 바꿔뿟죠</a:t>
-            </a:r>
+              <a:rPr lang="en-US" altLang="ko-KR"/>
+              <a:t>unique_ptr</a:t>
+            </a:r>
+            <a:r>
+              <a:rPr lang="ko-KR" altLang="en-US"/>
+              <a:t>로 다 바꾸면</a:t>
+            </a:r>
+            <a:r>
+              <a:rPr lang="en-US" altLang="ko-KR"/>
+              <a:t>?</a:t>
+            </a:r>
+            <a:endParaRPr lang="ko-KR" altLang="en-US"/>
           </a:p>
         </p:txBody>
       </p:sp>
@@ -5413,124 +5414,353 @@
       </p:grpSpPr>
       <p:sp>
         <p:nvSpPr>
-          <p:cNvPr id="2" name="제목 1">
-            <a:extLst>
-              <a:ext uri="{FF2B5EF4-FFF2-40B4-BE49-F238E27FC236}">
-                <a16:creationId xmlns:a16="http://schemas.microsoft.com/office/drawing/2014/main" id="{445EFE23-78FD-84E0-3707-9CA2A39E8F84}"/>
-              </a:ext>
-            </a:extLst>
-          </p:cNvPr>
-          <p:cNvSpPr>
-            <a:spLocks noGrp="1"/>
-          </p:cNvSpPr>
-          <p:nvPr>
-            <p:ph type="title"/>
-          </p:nvPr>
-        </p:nvSpPr>
-        <p:spPr/>
-        <p:txBody>
-          <a:bodyPr/>
-          <a:lstStyle/>
-          <a:p>
+          <p:cNvPr id="3" name="내용 개체 틀 2">
+            <a:extLst>
+              <a:ext uri="{FF2B5EF4-FFF2-40B4-BE49-F238E27FC236}">
+                <a16:creationId xmlns:a16="http://schemas.microsoft.com/office/drawing/2014/main" id="{9333ABCE-91C1-7539-C6D5-C88F3F30F7F9}"/>
+              </a:ext>
+            </a:extLst>
+          </p:cNvPr>
+          <p:cNvSpPr>
+            <a:spLocks noGrp="1"/>
+          </p:cNvSpPr>
+          <p:nvPr>
+            <p:ph idx="1"/>
+          </p:nvPr>
+        </p:nvSpPr>
+        <p:spPr>
+          <a:xfrm>
+            <a:off x="838200" y="501804"/>
+            <a:ext cx="10515600" cy="6255835"/>
+          </a:xfrm>
+        </p:spPr>
+        <p:txBody>
+          <a:bodyPr>
+            <a:normAutofit/>
+          </a:bodyPr>
+          <a:lstStyle/>
+          <a:p>
+            <a:pPr marL="0" indent="0">
+              <a:buNone/>
+            </a:pPr>
+            <a:r>
+              <a:rPr lang="en-US" altLang="ko-KR"/>
+              <a:t>class </a:t>
+            </a:r>
+            <a:r>
+              <a:rPr lang="ko-KR" altLang="en-US"/>
+              <a:t>지원</a:t>
+            </a:r>
+            <a:endParaRPr lang="en-US" altLang="ko-KR"/>
+          </a:p>
+          <a:p>
+            <a:pPr marL="0" indent="0">
+              <a:buNone/>
+            </a:pPr>
+            <a:r>
+              <a:rPr lang="en-US" altLang="ko-KR"/>
+              <a:t>  unique&lt;</a:t>
+            </a:r>
+            <a:r>
+              <a:rPr lang="ko-KR" altLang="en-US"/>
+              <a:t>지갑</a:t>
+            </a:r>
+            <a:r>
+              <a:rPr lang="en-US" altLang="ko-KR"/>
+              <a:t>&gt; m_</a:t>
+            </a:r>
+            <a:r>
+              <a:rPr lang="ko-KR" altLang="en-US"/>
+              <a:t>지갑</a:t>
+            </a:r>
+            <a:endParaRPr lang="en-US" altLang="ko-KR"/>
+          </a:p>
+          <a:p>
+            <a:pPr marL="0" indent="0">
+              <a:buNone/>
+            </a:pPr>
+            <a:r>
+              <a:rPr lang="en-US" altLang="ko-KR"/>
+              <a:t>  shared_ptr&lt;</a:t>
+            </a:r>
+            <a:r>
+              <a:rPr lang="ko-KR" altLang="en-US"/>
+              <a:t>지갑</a:t>
+            </a:r>
+            <a:r>
+              <a:rPr lang="en-US" altLang="ko-KR"/>
+              <a:t>&gt; m_</a:t>
+            </a:r>
+            <a:r>
+              <a:rPr lang="ko-KR" altLang="en-US"/>
+              <a:t>공유지갑</a:t>
+            </a:r>
+            <a:endParaRPr lang="en-US" altLang="ko-KR"/>
+          </a:p>
+          <a:p>
+            <a:pPr marL="0" indent="0">
+              <a:buNone/>
+            </a:pPr>
+            <a:r>
+              <a:rPr lang="ko-KR" altLang="en-US"/>
+              <a:t>  </a:t>
+            </a:r>
+            <a:r>
+              <a:rPr lang="en-US" altLang="ko-KR"/>
+              <a:t>weaked_ptr&lt;</a:t>
+            </a:r>
+            <a:r>
+              <a:rPr lang="ko-KR" altLang="en-US"/>
+              <a:t>지갑</a:t>
+            </a:r>
+            <a:r>
+              <a:rPr lang="en-US" altLang="ko-KR"/>
+              <a:t>&gt; m_</a:t>
+            </a:r>
+            <a:r>
+              <a:rPr lang="ko-KR" altLang="en-US"/>
+              <a:t>가상지갑</a:t>
+            </a:r>
+            <a:endParaRPr lang="en-US" altLang="ko-KR"/>
+          </a:p>
+          <a:p>
+            <a:pPr marL="0" indent="0">
+              <a:buNone/>
+            </a:pPr>
+            <a:r>
+              <a:rPr lang="en-US" altLang="ko-KR"/>
+              <a:t>  int </a:t>
+            </a:r>
+            <a:r>
+              <a:rPr lang="ko-KR" altLang="en-US"/>
+              <a:t>니</a:t>
+            </a:r>
+            <a:r>
+              <a:rPr lang="en-US" altLang="ko-KR"/>
+              <a:t>_</a:t>
+            </a:r>
+            <a:r>
+              <a:rPr lang="ko-KR" altLang="en-US"/>
+              <a:t>돈</a:t>
+            </a:r>
+            <a:r>
+              <a:rPr lang="en-US" altLang="ko-KR"/>
+              <a:t>_</a:t>
+            </a:r>
+            <a:r>
+              <a:rPr lang="ko-KR" altLang="en-US"/>
+              <a:t>얼마있냐</a:t>
+            </a:r>
+            <a:r>
+              <a:rPr lang="en-US" altLang="ko-KR"/>
+              <a:t>() { return m_</a:t>
+            </a:r>
+            <a:r>
+              <a:rPr lang="ko-KR" altLang="en-US"/>
+              <a:t>지갑</a:t>
+            </a:r>
+            <a:r>
+              <a:rPr lang="en-US" altLang="ko-KR"/>
+              <a:t>.</a:t>
+            </a:r>
+            <a:r>
+              <a:rPr lang="ko-KR" altLang="en-US"/>
+              <a:t>돈</a:t>
+            </a:r>
+            <a:r>
+              <a:rPr lang="en-US" altLang="ko-KR"/>
+              <a:t>; }</a:t>
+            </a:r>
+          </a:p>
+          <a:p>
+            <a:pPr marL="0" indent="0">
+              <a:buNone/>
+            </a:pPr>
+            <a:endParaRPr lang="en-US" altLang="ko-KR"/>
+          </a:p>
+          <a:p>
+            <a:pPr marL="0" indent="0">
+              <a:buNone/>
+            </a:pPr>
+            <a:r>
+              <a:rPr lang="en-US" altLang="ko-KR"/>
+              <a:t>(</a:t>
+            </a:r>
+            <a:r>
+              <a:rPr lang="ko-KR" altLang="en-US"/>
+              <a:t>외부 함수</a:t>
+            </a:r>
+            <a:r>
+              <a:rPr lang="en-US" altLang="ko-KR"/>
+              <a:t>)</a:t>
+            </a:r>
+          </a:p>
+          <a:p>
+            <a:pPr marL="0" indent="0">
+              <a:buNone/>
+            </a:pPr>
+            <a:r>
+              <a:rPr lang="en-US" altLang="ko-KR"/>
+              <a:t>1. </a:t>
+            </a:r>
+            <a:r>
+              <a:rPr lang="ko-KR" altLang="en-US"/>
+              <a:t>지원인스탄스</a:t>
+            </a:r>
+            <a:r>
+              <a:rPr lang="en-US" altLang="ko-KR"/>
+              <a:t>.m_</a:t>
+            </a:r>
+            <a:r>
+              <a:rPr lang="ko-KR" altLang="en-US"/>
+              <a:t>지갑</a:t>
+            </a:r>
+            <a:r>
+              <a:rPr lang="en-US" altLang="ko-KR"/>
+              <a:t>.</a:t>
+            </a:r>
+            <a:r>
+              <a:rPr lang="ko-KR" altLang="en-US"/>
+              <a:t>돈    </a:t>
+            </a:r>
+            <a:r>
+              <a:rPr lang="en-US" altLang="ko-KR"/>
+              <a:t>&lt;&lt; </a:t>
+            </a:r>
+            <a:r>
+              <a:rPr lang="ko-KR" altLang="en-US"/>
+              <a:t>못읽음</a:t>
+            </a:r>
+            <a:endParaRPr lang="en-US" altLang="ko-KR"/>
+          </a:p>
+          <a:p>
+            <a:pPr marL="0" indent="0">
+              <a:buNone/>
+            </a:pPr>
+            <a:r>
+              <a:rPr lang="en-US" altLang="ko-KR"/>
+              <a:t>2. </a:t>
+            </a:r>
+            <a:r>
+              <a:rPr lang="ko-KR" altLang="en-US"/>
+              <a:t>지원인스탄스</a:t>
+            </a:r>
+            <a:r>
+              <a:rPr lang="en-US" altLang="ko-KR"/>
+              <a:t>.m_</a:t>
+            </a:r>
+            <a:r>
+              <a:rPr lang="ko-KR" altLang="en-US"/>
+              <a:t>공유지갑</a:t>
+            </a:r>
+            <a:r>
+              <a:rPr lang="en-US" altLang="ko-KR"/>
+              <a:t>.</a:t>
+            </a:r>
+            <a:r>
+              <a:rPr lang="ko-KR" altLang="en-US"/>
+              <a:t>돈 </a:t>
+            </a:r>
+            <a:r>
+              <a:rPr lang="en-US" altLang="ko-KR"/>
+              <a:t>= 0</a:t>
+            </a:r>
+          </a:p>
+          <a:p>
+            <a:pPr marL="0" indent="0">
+              <a:buNone/>
+            </a:pPr>
+            <a:r>
+              <a:rPr lang="ko-KR" altLang="en-US"/>
+              <a:t>지원인스탄스</a:t>
+            </a:r>
+            <a:r>
+              <a:rPr lang="en-US" altLang="ko-KR"/>
+              <a:t>.m_</a:t>
+            </a:r>
+            <a:r>
+              <a:rPr lang="ko-KR" altLang="en-US"/>
+              <a:t>공유지갑</a:t>
+            </a:r>
+            <a:r>
+              <a:rPr lang="en-US" altLang="ko-KR"/>
+              <a:t>.</a:t>
+            </a:r>
+            <a:r>
+              <a:rPr lang="ko-KR" altLang="en-US"/>
+              <a:t>카드값가져오기</a:t>
+            </a:r>
+            <a:endParaRPr lang="en-US" altLang="ko-KR"/>
+          </a:p>
+          <a:p>
+            <a:pPr marL="0" indent="0">
+              <a:buNone/>
+            </a:pPr>
+            <a:r>
+              <a:rPr lang="en-US" altLang="ko-KR"/>
+              <a:t>3. if (</a:t>
+            </a:r>
+            <a:r>
+              <a:rPr lang="ko-KR" altLang="en-US"/>
+              <a:t>지원인스탄스</a:t>
+            </a:r>
+            <a:r>
+              <a:rPr lang="en-US" altLang="ko-KR"/>
+              <a:t>.m_</a:t>
+            </a:r>
+            <a:r>
+              <a:rPr lang="ko-KR" altLang="en-US"/>
+              <a:t>가상지갑</a:t>
+            </a:r>
+            <a:r>
+              <a:rPr lang="en-US" altLang="ko-KR"/>
+              <a:t>.expired() == false)</a:t>
+            </a:r>
+          </a:p>
+          <a:p>
+            <a:pPr marL="0" indent="0">
+              <a:buNone/>
+            </a:pPr>
+            <a:r>
+              <a:rPr lang="ko-KR" altLang="en-US"/>
+              <a:t>    </a:t>
+            </a:r>
+            <a:r>
+              <a:rPr lang="en-US" altLang="ko-KR"/>
+              <a:t>auto </a:t>
+            </a:r>
+            <a:r>
+              <a:rPr lang="ko-KR" altLang="en-US"/>
+              <a:t>지갑 </a:t>
+            </a:r>
+            <a:r>
+              <a:rPr lang="en-US" altLang="ko-KR"/>
+              <a:t>= </a:t>
+            </a:r>
+            <a:r>
+              <a:rPr lang="ko-KR" altLang="en-US"/>
+              <a:t>지원인스탄스</a:t>
+            </a:r>
+            <a:r>
+              <a:rPr lang="en-US" altLang="ko-KR"/>
+              <a:t>.m_</a:t>
+            </a:r>
+            <a:r>
+              <a:rPr lang="ko-KR" altLang="en-US"/>
+              <a:t>가상지갑</a:t>
+            </a:r>
+            <a:r>
+              <a:rPr lang="en-US" altLang="ko-KR"/>
+              <a:t>.lock()</a:t>
+            </a:r>
             <a:endParaRPr lang="ko-KR" altLang="en-US"/>
-          </a:p>
-        </p:txBody>
-      </p:sp>
-      <p:sp>
-        <p:nvSpPr>
-          <p:cNvPr id="3" name="내용 개체 틀 2">
-            <a:extLst>
-              <a:ext uri="{FF2B5EF4-FFF2-40B4-BE49-F238E27FC236}">
-                <a16:creationId xmlns:a16="http://schemas.microsoft.com/office/drawing/2014/main" id="{427C5AF2-C688-38ED-2F2D-8C2DB8C97003}"/>
-              </a:ext>
-            </a:extLst>
-          </p:cNvPr>
-          <p:cNvSpPr>
-            <a:spLocks noGrp="1"/>
-          </p:cNvSpPr>
-          <p:nvPr>
-            <p:ph idx="1"/>
-          </p:nvPr>
-        </p:nvSpPr>
-        <p:spPr/>
-        <p:txBody>
-          <a:bodyPr/>
-          <a:lstStyle/>
-          <a:p>
-            <a:r>
-              <a:rPr lang="ko-KR" altLang="en-US"/>
-              <a:t>예외</a:t>
-            </a:r>
-            <a:endParaRPr lang="en-US" altLang="ko-KR"/>
-          </a:p>
-          <a:p>
-            <a:r>
-              <a:rPr lang="en-US" altLang="ko-KR"/>
-              <a:t>unique_ptr </a:t>
-            </a:r>
-            <a:r>
-              <a:rPr lang="ko-KR" altLang="en-US"/>
-              <a:t>에 </a:t>
-            </a:r>
-            <a:r>
-              <a:rPr lang="en-US" altLang="ko-KR"/>
-              <a:t>deleter</a:t>
-            </a:r>
-            <a:r>
-              <a:rPr lang="ko-KR" altLang="en-US"/>
-              <a:t>가 있는 경우</a:t>
-            </a:r>
-            <a:endParaRPr lang="en-US" altLang="ko-KR"/>
-          </a:p>
-          <a:p>
-            <a:r>
-              <a:rPr lang="en-US" altLang="ko-KR"/>
-              <a:t>uqniue_ptr&lt;T, void(*)(T*)&gt; … 8</a:t>
-            </a:r>
-            <a:r>
-              <a:rPr lang="ko-KR" altLang="en-US"/>
-              <a:t>바이트 더쓴다</a:t>
-            </a:r>
-            <a:endParaRPr lang="en-US" altLang="ko-KR"/>
-          </a:p>
-          <a:p>
-            <a:r>
-              <a:rPr lang="en-US" altLang="ko-KR"/>
-              <a:t>vector </a:t>
-            </a:r>
-            <a:r>
-              <a:rPr lang="ko-KR" altLang="en-US"/>
-              <a:t>등에서 참고</a:t>
-            </a:r>
-            <a:endParaRPr lang="en-US" altLang="ko-KR"/>
-          </a:p>
-          <a:p>
-            <a:endParaRPr lang="en-US" altLang="ko-KR"/>
-          </a:p>
-          <a:p>
-            <a:r>
-              <a:rPr lang="en-US" altLang="ko-KR"/>
-              <a:t>shared_ptr</a:t>
-            </a:r>
-            <a:r>
-              <a:rPr lang="ko-KR" altLang="en-US"/>
-              <a:t>은 컨트롤 블록에 언제나 </a:t>
-            </a:r>
-            <a:r>
-              <a:rPr lang="en-US" altLang="ko-KR"/>
-              <a:t>deleter</a:t>
-            </a:r>
-            <a:r>
-              <a:rPr lang="ko-KR" altLang="en-US"/>
-              <a:t>를 항상 저장</a:t>
-            </a:r>
           </a:p>
         </p:txBody>
       </p:sp>
     </p:spTree>
     <p:extLst>
       <p:ext uri="{BB962C8B-B14F-4D97-AF65-F5344CB8AC3E}">
-        <p14:creationId xmlns:p14="http://schemas.microsoft.com/office/powerpoint/2010/main" val="1411289294"/>
+        <p14:creationId xmlns:p14="http://schemas.microsoft.com/office/powerpoint/2010/main" val="2939106210"/>
       </p:ext>
     </p:extLst>
   </p:cSld>
